--- a/docs/Inside-RetroCastX.pptx
+++ b/docs/Inside-RetroCastX.pptx
@@ -5,12 +5,14 @@
     <p:sldMasterId id="2147483731" r:id="rId1"/>
   </p:sldMasterIdLst>
   <p:notesMasterIdLst>
-    <p:notesMasterId r:id="rId5"/>
+    <p:notesMasterId r:id="rId7"/>
   </p:notesMasterIdLst>
   <p:sldIdLst>
     <p:sldId id="256" r:id="rId2"/>
     <p:sldId id="257" r:id="rId3"/>
     <p:sldId id="258" r:id="rId4"/>
+    <p:sldId id="259" r:id="rId5"/>
+    <p:sldId id="260" r:id="rId6"/>
   </p:sldIdLst>
   <p:sldSz cx="9144000" cy="6858000" type="screen4x3"/>
   <p:notesSz cx="6858000" cy="9144000"/>
@@ -199,7 +201,7 @@
           <a:p>
             <a:fld id="{0611A3A9-DE0C-B54E-B28C-6546C0BB25CE}" type="datetimeFigureOut">
               <a:rPr kumimoji="1" lang="ja-JP" altLang="en-US" smtClean="0"/>
-              <a:t>2026/8/9</a:t>
+              <a:t>2026/9/19</a:t>
             </a:fld>
             <a:endParaRPr kumimoji="1" lang="ja-JP" altLang="en-US"/>
           </a:p>
@@ -645,7 +647,7 @@
           <a:p>
             <a:fld id="{3EBCEBF8-DC12-4A41-BC42-8B1EDD45961F}" type="datetime1">
               <a:rPr kumimoji="1" lang="ja-JP" altLang="en-US" smtClean="0"/>
-              <a:t>2026/8/9</a:t>
+              <a:t>2026/9/19</a:t>
             </a:fld>
             <a:endParaRPr kumimoji="1" lang="ja-JP" altLang="en-US"/>
           </a:p>
@@ -879,7 +881,7 @@
           <a:p>
             <a:fld id="{39ECFA6A-3358-EF46-A120-F8F560EA8934}" type="datetime1">
               <a:rPr kumimoji="1" lang="ja-JP" altLang="en-US" smtClean="0"/>
-              <a:t>2026/8/9</a:t>
+              <a:t>2026/9/19</a:t>
             </a:fld>
             <a:endParaRPr kumimoji="1" lang="ja-JP" altLang="en-US"/>
           </a:p>
@@ -1123,7 +1125,7 @@
           <a:p>
             <a:fld id="{27D45CA2-E91C-6D44-A1B3-C66957864EEE}" type="datetime1">
               <a:rPr kumimoji="1" lang="ja-JP" altLang="en-US" smtClean="0"/>
-              <a:t>2026/8/9</a:t>
+              <a:t>2026/9/19</a:t>
             </a:fld>
             <a:endParaRPr kumimoji="1" lang="ja-JP" altLang="en-US"/>
           </a:p>
@@ -1357,7 +1359,7 @@
           <a:p>
             <a:fld id="{BEE6B9C4-73C3-3348-96F9-7E27AE0CAA35}" type="datetime1">
               <a:rPr kumimoji="1" lang="ja-JP" altLang="en-US" smtClean="0"/>
-              <a:t>2026/8/9</a:t>
+              <a:t>2026/9/19</a:t>
             </a:fld>
             <a:endParaRPr kumimoji="1" lang="ja-JP" altLang="en-US"/>
           </a:p>
@@ -1636,7 +1638,7 @@
           <a:p>
             <a:fld id="{582928D2-3A9E-1840-8265-6ACB352173F2}" type="datetime1">
               <a:rPr kumimoji="1" lang="ja-JP" altLang="en-US" smtClean="0"/>
-              <a:t>2026/8/9</a:t>
+              <a:t>2026/9/19</a:t>
             </a:fld>
             <a:endParaRPr kumimoji="1" lang="ja-JP" altLang="en-US"/>
           </a:p>
@@ -1969,7 +1971,7 @@
           <a:p>
             <a:fld id="{877A7542-7F94-0B47-9902-FD0E5C4048F9}" type="datetime1">
               <a:rPr kumimoji="1" lang="ja-JP" altLang="en-US" smtClean="0"/>
-              <a:t>2026/8/9</a:t>
+              <a:t>2026/9/19</a:t>
             </a:fld>
             <a:endParaRPr kumimoji="1" lang="ja-JP" altLang="en-US"/>
           </a:p>
@@ -2449,7 +2451,7 @@
           <a:p>
             <a:fld id="{97D6AEAD-6313-9341-8AE9-BDF2811566C2}" type="datetime1">
               <a:rPr kumimoji="1" lang="ja-JP" altLang="en-US" smtClean="0"/>
-              <a:t>2026/8/9</a:t>
+              <a:t>2026/9/19</a:t>
             </a:fld>
             <a:endParaRPr kumimoji="1" lang="ja-JP" altLang="en-US"/>
           </a:p>
@@ -2594,7 +2596,7 @@
           <a:p>
             <a:fld id="{549A3F53-62DE-0A4D-B1B3-E9160981BB2E}" type="datetime1">
               <a:rPr kumimoji="1" lang="ja-JP" altLang="en-US" smtClean="0"/>
-              <a:t>2026/8/9</a:t>
+              <a:t>2026/9/19</a:t>
             </a:fld>
             <a:endParaRPr kumimoji="1" lang="ja-JP" altLang="en-US"/>
           </a:p>
@@ -2711,7 +2713,7 @@
           <a:p>
             <a:fld id="{84702CFB-2461-C24B-8477-FC7B41587221}" type="datetime1">
               <a:rPr kumimoji="1" lang="ja-JP" altLang="en-US" smtClean="0"/>
-              <a:t>2026/8/9</a:t>
+              <a:t>2026/9/19</a:t>
             </a:fld>
             <a:endParaRPr kumimoji="1" lang="ja-JP" altLang="en-US"/>
           </a:p>
@@ -3058,7 +3060,7 @@
           <a:p>
             <a:fld id="{F0C4A98F-0142-AE4A-B78F-DF7D9A439098}" type="datetime1">
               <a:rPr kumimoji="1" lang="ja-JP" altLang="en-US" smtClean="0"/>
-              <a:t>2026/8/9</a:t>
+              <a:t>2026/9/19</a:t>
             </a:fld>
             <a:endParaRPr kumimoji="1" lang="ja-JP" altLang="en-US"/>
           </a:p>
@@ -3350,7 +3352,7 @@
           <a:p>
             <a:fld id="{6F4ED2A2-CA9D-E04D-8808-299DB345BAE9}" type="datetime1">
               <a:rPr kumimoji="1" lang="ja-JP" altLang="en-US" smtClean="0"/>
-              <a:t>2026/8/9</a:t>
+              <a:t>2026/9/19</a:t>
             </a:fld>
             <a:endParaRPr kumimoji="1" lang="ja-JP" altLang="en-US"/>
           </a:p>
@@ -3627,7 +3629,7 @@
           <a:p>
             <a:fld id="{4F48EC6A-A133-C84F-B5EE-7E2745BABCEB}" type="datetime1">
               <a:rPr kumimoji="1" lang="ja-JP" altLang="en-US" smtClean="0"/>
-              <a:t>2026/8/9</a:t>
+              <a:t>2026/9/19</a:t>
             </a:fld>
             <a:endParaRPr kumimoji="1" lang="ja-JP" altLang="en-US"/>
           </a:p>
@@ -23109,6 +23111,370 @@
 </p:sld>
 </file>
 
+<file path=ppt/slides/slide4.xml><?xml version="1.0" encoding="utf-8"?>
+<p:sld xmlns:a="http://schemas.openxmlformats.org/drawingml/2006/main" xmlns:r="http://schemas.openxmlformats.org/officeDocument/2006/relationships" xmlns:p="http://schemas.openxmlformats.org/presentationml/2006/main">
+  <p:cSld>
+    <p:spTree>
+      <p:nvGrpSpPr>
+        <p:cNvPr id="1" name=""/>
+        <p:cNvGrpSpPr/>
+        <p:nvPr/>
+      </p:nvGrpSpPr>
+      <p:grpSpPr>
+        <a:xfrm>
+          <a:off x="0" y="0"/>
+          <a:ext cx="0" cy="0"/>
+          <a:chOff x="0" y="0"/>
+          <a:chExt cx="0" cy="0"/>
+        </a:xfrm>
+      </p:grpSpPr>
+      <p:pic>
+        <p:nvPicPr>
+          <p:cNvPr id="4" name="図 3">
+            <a:extLst>
+              <a:ext uri="{FF2B5EF4-FFF2-40B4-BE49-F238E27FC236}">
+                <a16:creationId xmlns:a16="http://schemas.microsoft.com/office/drawing/2014/main" id="{C38103AF-ED78-EB47-EDC0-EEBCDFF93F5A}"/>
+              </a:ext>
+            </a:extLst>
+          </p:cNvPr>
+          <p:cNvPicPr>
+            <a:picLocks noChangeAspect="1"/>
+          </p:cNvPicPr>
+          <p:nvPr/>
+        </p:nvPicPr>
+        <p:blipFill>
+          <a:blip r:embed="rId2"/>
+          <a:srcRect l="23294" t="13431" r="25765" b="13431"/>
+          <a:stretch>
+            <a:fillRect/>
+          </a:stretch>
+        </p:blipFill>
+        <p:spPr>
+          <a:xfrm>
+            <a:off x="1604772" y="729028"/>
+            <a:ext cx="5934456" cy="5399944"/>
+          </a:xfrm>
+          <a:prstGeom prst="rect">
+            <a:avLst/>
+          </a:prstGeom>
+        </p:spPr>
+      </p:pic>
+      <p:sp>
+        <p:nvSpPr>
+          <p:cNvPr id="2" name="フッター プレースホルダー 1">
+            <a:extLst>
+              <a:ext uri="{FF2B5EF4-FFF2-40B4-BE49-F238E27FC236}">
+                <a16:creationId xmlns:a16="http://schemas.microsoft.com/office/drawing/2014/main" id="{9D674E35-5C92-8D5D-689C-B486FD95A9C1}"/>
+              </a:ext>
+            </a:extLst>
+          </p:cNvPr>
+          <p:cNvSpPr>
+            <a:spLocks noGrp="1"/>
+          </p:cNvSpPr>
+          <p:nvPr>
+            <p:ph type="ftr" sz="quarter" idx="11"/>
+          </p:nvPr>
+        </p:nvSpPr>
+        <p:spPr/>
+        <p:txBody>
+          <a:bodyPr/>
+          <a:lstStyle/>
+          <a:p>
+            <a:r>
+              <a:rPr kumimoji="1" lang="en-US" altLang="ja-JP"/>
+              <a:t>Copyright (c) 2026. Kunihiko Ohnaka. All rights reserved.</a:t>
+            </a:r>
+            <a:endParaRPr kumimoji="1" lang="ja-JP" altLang="en-US"/>
+          </a:p>
+        </p:txBody>
+      </p:sp>
+      <p:pic>
+        <p:nvPicPr>
+          <p:cNvPr id="6" name="図 5">
+            <a:extLst>
+              <a:ext uri="{FF2B5EF4-FFF2-40B4-BE49-F238E27FC236}">
+                <a16:creationId xmlns:a16="http://schemas.microsoft.com/office/drawing/2014/main" id="{A22AC0AC-C7CB-D774-EB1C-C0925D276DF1}"/>
+              </a:ext>
+            </a:extLst>
+          </p:cNvPr>
+          <p:cNvPicPr>
+            <a:picLocks noChangeAspect="1"/>
+          </p:cNvPicPr>
+          <p:nvPr/>
+        </p:nvPicPr>
+        <p:blipFill>
+          <a:blip r:embed="rId3"/>
+          <a:srcRect l="42803" t="13602" r="47093" b="13766"/>
+          <a:stretch>
+            <a:fillRect/>
+          </a:stretch>
+        </p:blipFill>
+        <p:spPr>
+          <a:xfrm>
+            <a:off x="7539228" y="729028"/>
+            <a:ext cx="1185272" cy="5399944"/>
+          </a:xfrm>
+          <a:prstGeom prst="rect">
+            <a:avLst/>
+          </a:prstGeom>
+        </p:spPr>
+      </p:pic>
+      <p:pic>
+        <p:nvPicPr>
+          <p:cNvPr id="7" name="図 6">
+            <a:extLst>
+              <a:ext uri="{FF2B5EF4-FFF2-40B4-BE49-F238E27FC236}">
+                <a16:creationId xmlns:a16="http://schemas.microsoft.com/office/drawing/2014/main" id="{CF4AB9B3-7430-4526-7486-C2F225AE49A6}"/>
+              </a:ext>
+            </a:extLst>
+          </p:cNvPr>
+          <p:cNvPicPr>
+            <a:picLocks noChangeAspect="1"/>
+          </p:cNvPicPr>
+          <p:nvPr/>
+        </p:nvPicPr>
+        <p:blipFill>
+          <a:blip r:embed="rId4"/>
+          <a:srcRect l="47794" t="13508" r="42941" b="13632"/>
+          <a:stretch>
+            <a:fillRect/>
+          </a:stretch>
+        </p:blipFill>
+        <p:spPr>
+          <a:xfrm>
+            <a:off x="514350" y="729028"/>
+            <a:ext cx="1090422" cy="5434802"/>
+          </a:xfrm>
+          <a:prstGeom prst="rect">
+            <a:avLst/>
+          </a:prstGeom>
+        </p:spPr>
+      </p:pic>
+    </p:spTree>
+    <p:extLst>
+      <p:ext uri="{BB962C8B-B14F-4D97-AF65-F5344CB8AC3E}">
+        <p14:creationId xmlns:p14="http://schemas.microsoft.com/office/powerpoint/2010/main" val="1640711960"/>
+      </p:ext>
+    </p:extLst>
+  </p:cSld>
+  <p:clrMapOvr>
+    <a:masterClrMapping/>
+  </p:clrMapOvr>
+</p:sld>
+</file>
+
+<file path=ppt/slides/slide5.xml><?xml version="1.0" encoding="utf-8"?>
+<p:sld xmlns:a="http://schemas.openxmlformats.org/drawingml/2006/main" xmlns:r="http://schemas.openxmlformats.org/officeDocument/2006/relationships" xmlns:p="http://schemas.openxmlformats.org/presentationml/2006/main">
+  <p:cSld>
+    <p:spTree>
+      <p:nvGrpSpPr>
+        <p:cNvPr id="1" name="">
+          <a:extLst>
+            <a:ext uri="{FF2B5EF4-FFF2-40B4-BE49-F238E27FC236}">
+              <a16:creationId xmlns:a16="http://schemas.microsoft.com/office/drawing/2014/main" id="{078AF68B-EAA0-6FA9-5BEA-6EBAE69A81E4}"/>
+            </a:ext>
+          </a:extLst>
+        </p:cNvPr>
+        <p:cNvGrpSpPr/>
+        <p:nvPr/>
+      </p:nvGrpSpPr>
+      <p:grpSpPr>
+        <a:xfrm>
+          <a:off x="0" y="0"/>
+          <a:ext cx="0" cy="0"/>
+          <a:chOff x="0" y="0"/>
+          <a:chExt cx="0" cy="0"/>
+        </a:xfrm>
+      </p:grpSpPr>
+      <p:pic>
+        <p:nvPicPr>
+          <p:cNvPr id="4" name="図 3">
+            <a:extLst>
+              <a:ext uri="{FF2B5EF4-FFF2-40B4-BE49-F238E27FC236}">
+                <a16:creationId xmlns:a16="http://schemas.microsoft.com/office/drawing/2014/main" id="{E4CCCFC7-B3C9-33E7-E3F9-2593CAFAED2A}"/>
+              </a:ext>
+            </a:extLst>
+          </p:cNvPr>
+          <p:cNvPicPr>
+            <a:picLocks noChangeAspect="1"/>
+          </p:cNvPicPr>
+          <p:nvPr/>
+        </p:nvPicPr>
+        <p:blipFill>
+          <a:blip r:embed="rId2"/>
+          <a:srcRect l="23294" t="13931" r="25765" b="13850"/>
+          <a:stretch>
+            <a:fillRect/>
+          </a:stretch>
+        </p:blipFill>
+        <p:spPr>
+          <a:xfrm rot="10800000">
+            <a:off x="2610160" y="1985366"/>
+            <a:ext cx="4006800" cy="3600051"/>
+          </a:xfrm>
+          <a:prstGeom prst="rect">
+            <a:avLst/>
+          </a:prstGeom>
+        </p:spPr>
+      </p:pic>
+      <p:sp>
+        <p:nvSpPr>
+          <p:cNvPr id="2" name="フッター プレースホルダー 1">
+            <a:extLst>
+              <a:ext uri="{FF2B5EF4-FFF2-40B4-BE49-F238E27FC236}">
+                <a16:creationId xmlns:a16="http://schemas.microsoft.com/office/drawing/2014/main" id="{2ECBF535-D99E-A783-FD69-EA489BCA84E7}"/>
+              </a:ext>
+            </a:extLst>
+          </p:cNvPr>
+          <p:cNvSpPr>
+            <a:spLocks noGrp="1"/>
+          </p:cNvSpPr>
+          <p:nvPr>
+            <p:ph type="ftr" sz="quarter" idx="11"/>
+          </p:nvPr>
+        </p:nvSpPr>
+        <p:spPr/>
+        <p:txBody>
+          <a:bodyPr/>
+          <a:lstStyle/>
+          <a:p>
+            <a:r>
+              <a:rPr kumimoji="1" lang="en-US" altLang="ja-JP"/>
+              <a:t>Copyright (c) 2026. Kunihiko Ohnaka. All rights reserved.</a:t>
+            </a:r>
+            <a:endParaRPr kumimoji="1" lang="ja-JP" altLang="en-US"/>
+          </a:p>
+        </p:txBody>
+      </p:sp>
+      <p:pic>
+        <p:nvPicPr>
+          <p:cNvPr id="6" name="図 5">
+            <a:extLst>
+              <a:ext uri="{FF2B5EF4-FFF2-40B4-BE49-F238E27FC236}">
+                <a16:creationId xmlns:a16="http://schemas.microsoft.com/office/drawing/2014/main" id="{0485C4A1-06FA-49C0-B749-69C45FC23AA6}"/>
+              </a:ext>
+            </a:extLst>
+          </p:cNvPr>
+          <p:cNvPicPr>
+            <a:picLocks noChangeAspect="1"/>
+          </p:cNvPicPr>
+          <p:nvPr/>
+        </p:nvPicPr>
+        <p:blipFill>
+          <a:blip r:embed="rId3"/>
+          <a:srcRect l="42803" t="13763" r="47093" b="13766"/>
+          <a:stretch>
+            <a:fillRect/>
+          </a:stretch>
+        </p:blipFill>
+        <p:spPr>
+          <a:xfrm rot="10800000">
+            <a:off x="1171641" y="1985418"/>
+            <a:ext cx="791942" cy="3600000"/>
+          </a:xfrm>
+          <a:prstGeom prst="rect">
+            <a:avLst/>
+          </a:prstGeom>
+        </p:spPr>
+      </p:pic>
+      <p:pic>
+        <p:nvPicPr>
+          <p:cNvPr id="7" name="図 6">
+            <a:extLst>
+              <a:ext uri="{FF2B5EF4-FFF2-40B4-BE49-F238E27FC236}">
+                <a16:creationId xmlns:a16="http://schemas.microsoft.com/office/drawing/2014/main" id="{C1B4008B-DDEE-AB8F-7EC9-1241D4C4091B}"/>
+              </a:ext>
+            </a:extLst>
+          </p:cNvPr>
+          <p:cNvPicPr>
+            <a:picLocks noChangeAspect="1"/>
+          </p:cNvPicPr>
+          <p:nvPr/>
+        </p:nvPicPr>
+        <p:blipFill>
+          <a:blip r:embed="rId4"/>
+          <a:srcRect l="47794" t="14010" r="42941" b="13632"/>
+          <a:stretch>
+            <a:fillRect/>
+          </a:stretch>
+        </p:blipFill>
+        <p:spPr>
+          <a:xfrm rot="10800000">
+            <a:off x="7263535" y="1985366"/>
+            <a:ext cx="727200" cy="3599530"/>
+          </a:xfrm>
+          <a:prstGeom prst="rect">
+            <a:avLst/>
+          </a:prstGeom>
+        </p:spPr>
+      </p:pic>
+      <p:sp>
+        <p:nvSpPr>
+          <p:cNvPr id="3" name="角丸四角形 2">
+            <a:extLst>
+              <a:ext uri="{FF2B5EF4-FFF2-40B4-BE49-F238E27FC236}">
+                <a16:creationId xmlns:a16="http://schemas.microsoft.com/office/drawing/2014/main" id="{1E38FCFA-C42D-CA40-E7E6-156EF06EE543}"/>
+              </a:ext>
+            </a:extLst>
+          </p:cNvPr>
+          <p:cNvSpPr/>
+          <p:nvPr/>
+        </p:nvSpPr>
+        <p:spPr>
+          <a:xfrm>
+            <a:off x="2719137" y="1985366"/>
+            <a:ext cx="3600052" cy="3600052"/>
+          </a:xfrm>
+          <a:prstGeom prst="roundRect">
+            <a:avLst>
+              <a:gd name="adj" fmla="val 3522"/>
+            </a:avLst>
+          </a:prstGeom>
+          <a:solidFill>
+            <a:schemeClr val="tx1">
+              <a:lumMod val="85000"/>
+              <a:lumOff val="15000"/>
+            </a:schemeClr>
+          </a:solidFill>
+        </p:spPr>
+        <p:style>
+          <a:lnRef idx="2">
+            <a:schemeClr val="accent1">
+              <a:shade val="15000"/>
+            </a:schemeClr>
+          </a:lnRef>
+          <a:fillRef idx="1">
+            <a:schemeClr val="accent1"/>
+          </a:fillRef>
+          <a:effectRef idx="0">
+            <a:schemeClr val="accent1"/>
+          </a:effectRef>
+          <a:fontRef idx="minor">
+            <a:schemeClr val="lt1"/>
+          </a:fontRef>
+        </p:style>
+        <p:txBody>
+          <a:bodyPr rtlCol="0" anchor="ctr"/>
+          <a:lstStyle/>
+          <a:p>
+            <a:pPr algn="ctr"/>
+            <a:endParaRPr kumimoji="1" lang="ja-JP" altLang="en-US"/>
+          </a:p>
+        </p:txBody>
+      </p:sp>
+    </p:spTree>
+    <p:extLst>
+      <p:ext uri="{BB962C8B-B14F-4D97-AF65-F5344CB8AC3E}">
+        <p14:creationId xmlns:p14="http://schemas.microsoft.com/office/powerpoint/2010/main" val="243646483"/>
+      </p:ext>
+    </p:extLst>
+  </p:cSld>
+  <p:clrMapOvr>
+    <a:masterClrMapping/>
+  </p:clrMapOvr>
+</p:sld>
+</file>
+
 <file path=ppt/theme/theme1.xml><?xml version="1.0" encoding="utf-8"?>
 <a:theme xmlns:a="http://schemas.openxmlformats.org/drawingml/2006/main" name="Office テーマ">
   <a:themeElements>
